--- a/test-corpus/word-verification/sequence.pptx
+++ b/test-corpus/word-verification/sequence.pptx
@@ -144,7 +144,7 @@
         </p:nvSpPr>
         <p:spPr>
           <a:xfrm>
-            <a:off x="3548228" y="1305256"/>
+            <a:off x="1426820" y="1305256"/>
             <a:ext cx="622251" cy="235073"/>
           </a:xfrm>
           <a:prstGeom prst="rect">
@@ -168,7 +168,7 @@
         </p:nvSpPr>
         <p:spPr>
           <a:xfrm>
-            <a:off x="3548228" y="6027449"/>
+            <a:off x="1426820" y="6027449"/>
             <a:ext cx="622251" cy="235073"/>
           </a:xfrm>
           <a:prstGeom prst="rect">
@@ -192,7 +192,7 @@
         </p:nvSpPr>
         <p:spPr>
           <a:xfrm>
-            <a:off x="4516174" y="1305256"/>
+            <a:off x="2394766" y="1305256"/>
             <a:ext cx="622251" cy="235073"/>
           </a:xfrm>
           <a:prstGeom prst="rect">
@@ -216,7 +216,7 @@
         </p:nvSpPr>
         <p:spPr>
           <a:xfrm>
-            <a:off x="4516174" y="6027449"/>
+            <a:off x="2394766" y="6027449"/>
             <a:ext cx="622251" cy="235073"/>
           </a:xfrm>
           <a:prstGeom prst="rect">
@@ -240,7 +240,7 @@
         </p:nvSpPr>
         <p:spPr>
           <a:xfrm>
-            <a:off x="5622398" y="1305256"/>
+            <a:off x="3500990" y="1305256"/>
             <a:ext cx="622251" cy="235073"/>
           </a:xfrm>
           <a:prstGeom prst="rect">
@@ -264,7 +264,7 @@
         </p:nvSpPr>
         <p:spPr>
           <a:xfrm>
-            <a:off x="5622398" y="6027449"/>
+            <a:off x="3500990" y="6027449"/>
             <a:ext cx="622251" cy="235073"/>
           </a:xfrm>
           <a:prstGeom prst="rect">
@@ -288,7 +288,7 @@
         </p:nvSpPr>
         <p:spPr>
           <a:xfrm>
-            <a:off x="6590344" y="1305256"/>
+            <a:off x="4468936" y="1305256"/>
             <a:ext cx="622251" cy="235073"/>
           </a:xfrm>
           <a:prstGeom prst="rect">
@@ -312,7 +312,7 @@
         </p:nvSpPr>
         <p:spPr>
           <a:xfrm>
-            <a:off x="6590344" y="6027449"/>
+            <a:off x="4468936" y="6027449"/>
             <a:ext cx="622251" cy="235073"/>
           </a:xfrm>
           <a:prstGeom prst="rect">
@@ -336,7 +336,7 @@
         </p:nvSpPr>
         <p:spPr>
           <a:xfrm>
-            <a:off x="7558290" y="5211609"/>
+            <a:off x="5436882" y="5211609"/>
             <a:ext cx="622251" cy="235073"/>
           </a:xfrm>
           <a:prstGeom prst="rect">
@@ -360,7 +360,7 @@
         </p:nvSpPr>
         <p:spPr>
           <a:xfrm>
-            <a:off x="4578399" y="3137439"/>
+            <a:off x="2456991" y="3137439"/>
             <a:ext cx="1604025" cy="421748"/>
           </a:xfrm>
           <a:prstGeom prst="rect">
@@ -382,7 +382,7 @@
         </p:nvSpPr>
         <p:spPr>
           <a:xfrm>
-            <a:off x="4578399" y="3137439"/>
+            <a:off x="2456991" y="3137439"/>
             <a:ext cx="276556" cy="110622"/>
           </a:xfrm>
           <a:prstGeom prst="rect">
@@ -428,7 +428,7 @@
         </p:nvSpPr>
         <p:spPr>
           <a:xfrm>
-            <a:off x="4896438" y="3137439"/>
+            <a:off x="2775030" y="3137439"/>
             <a:ext cx="1244502" cy="110622"/>
           </a:xfrm>
           <a:prstGeom prst="rect">
@@ -470,7 +470,7 @@
         </p:nvSpPr>
         <p:spPr>
           <a:xfrm>
-            <a:off x="4578399" y="3655982"/>
+            <a:off x="2456991" y="3655982"/>
             <a:ext cx="1604025" cy="1209932"/>
           </a:xfrm>
           <a:prstGeom prst="rect">
@@ -492,7 +492,7 @@
         </p:nvSpPr>
         <p:spPr>
           <a:xfrm>
-            <a:off x="4578399" y="3655982"/>
+            <a:off x="2456991" y="3655982"/>
             <a:ext cx="235073" cy="110622"/>
           </a:xfrm>
           <a:prstGeom prst="rect">
@@ -538,7 +538,7 @@
         </p:nvSpPr>
         <p:spPr>
           <a:xfrm>
-            <a:off x="4854955" y="3655982"/>
+            <a:off x="2733547" y="3655982"/>
             <a:ext cx="1285985" cy="110622"/>
           </a:xfrm>
           <a:prstGeom prst="rect">
@@ -580,7 +580,7 @@
         </p:nvCxnSpPr>
         <p:spPr>
           <a:xfrm>
-            <a:off x="4578399" y="4091558"/>
+            <a:off x="2456991" y="4091558"/>
             <a:ext cx="1604025" cy="1"/>
           </a:xfrm>
           <a:prstGeom prst="line">
@@ -602,7 +602,7 @@
         </p:nvSpPr>
         <p:spPr>
           <a:xfrm>
-            <a:off x="4619882" y="4105385"/>
+            <a:off x="2498474" y="4105385"/>
             <a:ext cx="1521058" cy="96795"/>
           </a:xfrm>
           <a:prstGeom prst="rect">
@@ -644,7 +644,7 @@
         </p:nvCxnSpPr>
         <p:spPr>
           <a:xfrm>
-            <a:off x="3859353" y="1540329"/>
+            <a:off x="1737945" y="1540329"/>
             <a:ext cx="1" cy="4487120"/>
           </a:xfrm>
           <a:prstGeom prst="line">
@@ -666,7 +666,7 @@
         </p:nvCxnSpPr>
         <p:spPr>
           <a:xfrm>
-            <a:off x="4827299" y="1540329"/>
+            <a:off x="2705891" y="1540329"/>
             <a:ext cx="1" cy="4487120"/>
           </a:xfrm>
           <a:prstGeom prst="line">
@@ -688,7 +688,7 @@
         </p:nvCxnSpPr>
         <p:spPr>
           <a:xfrm>
-            <a:off x="5933523" y="1540329"/>
+            <a:off x="3812115" y="1540329"/>
             <a:ext cx="1" cy="4487120"/>
           </a:xfrm>
           <a:prstGeom prst="line">
@@ -710,7 +710,7 @@
         </p:nvCxnSpPr>
         <p:spPr>
           <a:xfrm>
-            <a:off x="6901469" y="1540329"/>
+            <a:off x="4780061" y="1540329"/>
             <a:ext cx="1" cy="4487120"/>
           </a:xfrm>
           <a:prstGeom prst="line">
@@ -732,7 +732,7 @@
         </p:nvCxnSpPr>
         <p:spPr>
           <a:xfrm>
-            <a:off x="7869415" y="5446682"/>
+            <a:off x="5748007" y="5446682"/>
             <a:ext cx="1" cy="200503"/>
           </a:xfrm>
           <a:prstGeom prst="line">
@@ -754,7 +754,7 @@
         </p:nvSpPr>
         <p:spPr>
           <a:xfrm>
-            <a:off x="5898954" y="2190235"/>
+            <a:off x="3777546" y="2190235"/>
             <a:ext cx="69139" cy="1790700"/>
           </a:xfrm>
           <a:prstGeom prst="rect">
@@ -778,7 +778,7 @@
         </p:nvSpPr>
         <p:spPr>
           <a:xfrm>
-            <a:off x="4792730" y="1851454"/>
+            <a:off x="2671322" y="1851454"/>
             <a:ext cx="69139" cy="4037717"/>
           </a:xfrm>
           <a:prstGeom prst="rect">
@@ -802,7 +802,7 @@
         </p:nvSpPr>
         <p:spPr>
           <a:xfrm>
-            <a:off x="5864384" y="2916195"/>
+            <a:off x="3742976" y="2916195"/>
             <a:ext cx="1106224" cy="152106"/>
           </a:xfrm>
           <a:prstGeom prst="rect">
@@ -826,7 +826,7 @@
         </p:nvSpPr>
         <p:spPr>
           <a:xfrm>
-            <a:off x="5905868" y="2950764"/>
+            <a:off x="3784460" y="2950764"/>
             <a:ext cx="1023257" cy="82967"/>
           </a:xfrm>
           <a:prstGeom prst="rect">
@@ -868,7 +868,7 @@
         </p:nvSpPr>
         <p:spPr>
           <a:xfrm>
-            <a:off x="4896438" y="4962709"/>
+            <a:off x="2775030" y="4962709"/>
             <a:ext cx="898807" cy="152106"/>
           </a:xfrm>
           <a:prstGeom prst="rect">
@@ -892,7 +892,7 @@
         </p:nvSpPr>
         <p:spPr>
           <a:xfrm>
-            <a:off x="4937922" y="4997278"/>
+            <a:off x="2816514" y="4997278"/>
             <a:ext cx="815840" cy="82967"/>
           </a:xfrm>
           <a:prstGeom prst="rect">
@@ -934,7 +934,7 @@
         </p:nvSpPr>
         <p:spPr>
           <a:xfrm>
-            <a:off x="3409950" y="1070183"/>
+            <a:off x="1288542" y="1070183"/>
             <a:ext cx="4908869" cy="124450"/>
           </a:xfrm>
           <a:prstGeom prst="rect">
@@ -976,7 +976,7 @@
         </p:nvCxnSpPr>
         <p:spPr>
           <a:xfrm>
-            <a:off x="3859353" y="1851454"/>
+            <a:off x="1737945" y="1851454"/>
             <a:ext cx="933377" cy="1"/>
           </a:xfrm>
           <a:prstGeom prst="line">
@@ -999,7 +999,7 @@
         </p:nvSpPr>
         <p:spPr>
           <a:xfrm>
-            <a:off x="3887009" y="1706262"/>
+            <a:off x="1765601" y="1706262"/>
             <a:ext cx="878065" cy="89881"/>
           </a:xfrm>
           <a:prstGeom prst="rect">
@@ -1041,7 +1041,7 @@
         </p:nvSpPr>
         <p:spPr>
           <a:xfrm>
-            <a:off x="3880095" y="1803057"/>
+            <a:off x="1758687" y="1803057"/>
             <a:ext cx="96795" cy="96795"/>
           </a:xfrm>
           <a:prstGeom prst="ellipse">
@@ -1063,7 +1063,7 @@
         </p:nvSpPr>
         <p:spPr>
           <a:xfrm>
-            <a:off x="3880095" y="1803057"/>
+            <a:off x="1758687" y="1803057"/>
             <a:ext cx="96795" cy="96795"/>
           </a:xfrm>
           <a:prstGeom prst="rect">
@@ -1105,7 +1105,7 @@
         </p:nvCxnSpPr>
         <p:spPr>
           <a:xfrm>
-            <a:off x="4861869" y="2093441"/>
+            <a:off x="2740461" y="2093441"/>
             <a:ext cx="1071654" cy="1"/>
           </a:xfrm>
           <a:prstGeom prst="line">
@@ -1128,7 +1128,7 @@
         </p:nvSpPr>
         <p:spPr>
           <a:xfrm>
-            <a:off x="4889525" y="1948249"/>
+            <a:off x="2768117" y="1948249"/>
             <a:ext cx="1016343" cy="89881"/>
           </a:xfrm>
           <a:prstGeom prst="rect">
@@ -1170,7 +1170,7 @@
         </p:nvSpPr>
         <p:spPr>
           <a:xfrm>
-            <a:off x="4882611" y="2045043"/>
+            <a:off x="2761203" y="2045043"/>
             <a:ext cx="96795" cy="96795"/>
           </a:xfrm>
           <a:prstGeom prst="ellipse">
@@ -1192,7 +1192,7 @@
         </p:nvSpPr>
         <p:spPr>
           <a:xfrm>
-            <a:off x="4882611" y="2045043"/>
+            <a:off x="2761203" y="2045043"/>
             <a:ext cx="96795" cy="96795"/>
           </a:xfrm>
           <a:prstGeom prst="rect">
@@ -1234,7 +1234,7 @@
         </p:nvCxnSpPr>
         <p:spPr>
           <a:xfrm>
-            <a:off x="5968093" y="2335427"/>
+            <a:off x="3846685" y="2335427"/>
             <a:ext cx="933376" cy="1"/>
           </a:xfrm>
           <a:prstGeom prst="line">
@@ -1257,7 +1257,7 @@
         </p:nvSpPr>
         <p:spPr>
           <a:xfrm>
-            <a:off x="5995748" y="2190235"/>
+            <a:off x="3874340" y="2190235"/>
             <a:ext cx="878065" cy="89881"/>
           </a:xfrm>
           <a:prstGeom prst="rect">
@@ -1299,7 +1299,7 @@
         </p:nvSpPr>
         <p:spPr>
           <a:xfrm>
-            <a:off x="5988835" y="2287030"/>
+            <a:off x="3867427" y="2287030"/>
             <a:ext cx="96795" cy="96795"/>
           </a:xfrm>
           <a:prstGeom prst="ellipse">
@@ -1321,7 +1321,7 @@
         </p:nvSpPr>
         <p:spPr>
           <a:xfrm>
-            <a:off x="5988835" y="2287030"/>
+            <a:off x="3867427" y="2287030"/>
             <a:ext cx="96795" cy="96795"/>
           </a:xfrm>
           <a:prstGeom prst="rect">
@@ -1363,7 +1363,7 @@
         </p:nvCxnSpPr>
         <p:spPr>
           <a:xfrm flipH="1">
-            <a:off x="5968093" y="2577414"/>
+            <a:off x="3846685" y="2577414"/>
             <a:ext cx="933376" cy="1"/>
           </a:xfrm>
           <a:prstGeom prst="line">
@@ -1386,7 +1386,7 @@
         </p:nvSpPr>
         <p:spPr>
           <a:xfrm>
-            <a:off x="5995748" y="2432222"/>
+            <a:off x="3874340" y="2432222"/>
             <a:ext cx="878065" cy="89881"/>
           </a:xfrm>
           <a:prstGeom prst="rect">
@@ -1428,7 +1428,7 @@
         </p:nvSpPr>
         <p:spPr>
           <a:xfrm>
-            <a:off x="6783933" y="2529016"/>
+            <a:off x="4662525" y="2529016"/>
             <a:ext cx="96795" cy="96795"/>
           </a:xfrm>
           <a:prstGeom prst="ellipse">
@@ -1450,7 +1450,7 @@
         </p:nvSpPr>
         <p:spPr>
           <a:xfrm>
-            <a:off x="6783933" y="2529016"/>
+            <a:off x="4662525" y="2529016"/>
             <a:ext cx="96795" cy="96795"/>
           </a:xfrm>
           <a:prstGeom prst="rect">
@@ -1492,7 +1492,7 @@
         </p:nvCxnSpPr>
         <p:spPr>
           <a:xfrm flipH="1">
-            <a:off x="4861869" y="2819400"/>
+            <a:off x="2740461" y="2819400"/>
             <a:ext cx="1037085" cy="1"/>
           </a:xfrm>
           <a:prstGeom prst="line">
@@ -1514,7 +1514,7 @@
         </p:nvCxnSpPr>
         <p:spPr>
           <a:xfrm>
-            <a:off x="4868783" y="2791744"/>
+            <a:off x="2747375" y="2791744"/>
             <a:ext cx="55311" cy="55312"/>
           </a:xfrm>
           <a:prstGeom prst="line">
@@ -1536,7 +1536,7 @@
         </p:nvCxnSpPr>
         <p:spPr>
           <a:xfrm flipV="1">
-            <a:off x="4868783" y="2791744"/>
+            <a:off x="2747375" y="2791744"/>
             <a:ext cx="55311" cy="55312"/>
           </a:xfrm>
           <a:prstGeom prst="line">
@@ -1558,7 +1558,7 @@
         </p:nvSpPr>
         <p:spPr>
           <a:xfrm>
-            <a:off x="4889525" y="2674208"/>
+            <a:off x="2768117" y="2674208"/>
             <a:ext cx="981774" cy="89881"/>
           </a:xfrm>
           <a:prstGeom prst="rect">
@@ -1600,7 +1600,7 @@
         </p:nvSpPr>
         <p:spPr>
           <a:xfrm>
-            <a:off x="5781418" y="2771003"/>
+            <a:off x="3660010" y="2771003"/>
             <a:ext cx="96795" cy="96795"/>
           </a:xfrm>
           <a:prstGeom prst="ellipse">
@@ -1622,7 +1622,7 @@
         </p:nvSpPr>
         <p:spPr>
           <a:xfrm>
-            <a:off x="5781418" y="2771003"/>
+            <a:off x="3660010" y="2771003"/>
             <a:ext cx="96795" cy="96795"/>
           </a:xfrm>
           <a:prstGeom prst="rect">
@@ -1664,7 +1664,7 @@
         </p:nvCxnSpPr>
         <p:spPr>
           <a:xfrm>
-            <a:off x="4861869" y="3462393"/>
+            <a:off x="2740461" y="3462393"/>
             <a:ext cx="1037085" cy="1"/>
           </a:xfrm>
           <a:prstGeom prst="line">
@@ -1687,7 +1687,7 @@
         </p:nvSpPr>
         <p:spPr>
           <a:xfrm>
-            <a:off x="4889525" y="3317201"/>
+            <a:off x="2768117" y="3317201"/>
             <a:ext cx="981774" cy="89881"/>
           </a:xfrm>
           <a:prstGeom prst="rect">
@@ -1729,7 +1729,7 @@
         </p:nvSpPr>
         <p:spPr>
           <a:xfrm>
-            <a:off x="4882611" y="3413995"/>
+            <a:off x="2761203" y="3413995"/>
             <a:ext cx="96795" cy="96795"/>
           </a:xfrm>
           <a:prstGeom prst="ellipse">
@@ -1751,7 +1751,7 @@
         </p:nvSpPr>
         <p:spPr>
           <a:xfrm>
-            <a:off x="4882611" y="3413995"/>
+            <a:off x="2761203" y="3413995"/>
             <a:ext cx="96795" cy="96795"/>
           </a:xfrm>
           <a:prstGeom prst="rect">
@@ -1793,7 +1793,7 @@
         </p:nvCxnSpPr>
         <p:spPr>
           <a:xfrm flipH="1">
-            <a:off x="4861869" y="3980935"/>
+            <a:off x="2740461" y="3980935"/>
             <a:ext cx="1037085" cy="1"/>
           </a:xfrm>
           <a:prstGeom prst="line">
@@ -1816,7 +1816,7 @@
         </p:nvSpPr>
         <p:spPr>
           <a:xfrm>
-            <a:off x="4889525" y="3835743"/>
+            <a:off x="2768117" y="3835743"/>
             <a:ext cx="981774" cy="89881"/>
           </a:xfrm>
           <a:prstGeom prst="rect">
@@ -1858,7 +1858,7 @@
         </p:nvSpPr>
         <p:spPr>
           <a:xfrm>
-            <a:off x="5781418" y="3932538"/>
+            <a:off x="3660010" y="3932538"/>
             <a:ext cx="96795" cy="96795"/>
           </a:xfrm>
           <a:prstGeom prst="ellipse">
@@ -1880,7 +1880,7 @@
         </p:nvSpPr>
         <p:spPr>
           <a:xfrm>
-            <a:off x="5781418" y="3932538"/>
+            <a:off x="3660010" y="3932538"/>
             <a:ext cx="96795" cy="96795"/>
           </a:xfrm>
           <a:prstGeom prst="rect">
@@ -1922,7 +1922,7 @@
         </p:nvCxnSpPr>
         <p:spPr>
           <a:xfrm flipH="1">
-            <a:off x="4861869" y="4388855"/>
+            <a:off x="2740461" y="4388855"/>
             <a:ext cx="1071654" cy="1"/>
           </a:xfrm>
           <a:prstGeom prst="line">
@@ -1945,7 +1945,7 @@
         </p:nvSpPr>
         <p:spPr>
           <a:xfrm>
-            <a:off x="4889525" y="4243663"/>
+            <a:off x="2768117" y="4243663"/>
             <a:ext cx="1016343" cy="89881"/>
           </a:xfrm>
           <a:prstGeom prst="rect">
@@ -1987,7 +1987,7 @@
         </p:nvSpPr>
         <p:spPr>
           <a:xfrm>
-            <a:off x="5815987" y="4340458"/>
+            <a:off x="3694579" y="4340458"/>
             <a:ext cx="96795" cy="96795"/>
           </a:xfrm>
           <a:prstGeom prst="ellipse">
@@ -2009,7 +2009,7 @@
         </p:nvSpPr>
         <p:spPr>
           <a:xfrm>
-            <a:off x="5815987" y="4340458"/>
+            <a:off x="3694579" y="4340458"/>
             <a:ext cx="96795" cy="96795"/>
           </a:xfrm>
           <a:prstGeom prst="rect">
@@ -2051,7 +2051,7 @@
         </p:nvCxnSpPr>
         <p:spPr>
           <a:xfrm>
-            <a:off x="5933523" y="4630842"/>
+            <a:off x="3812115" y="4630842"/>
             <a:ext cx="207417" cy="1"/>
           </a:xfrm>
           <a:prstGeom prst="line">
@@ -2073,7 +2073,7 @@
         </p:nvCxnSpPr>
         <p:spPr>
           <a:xfrm>
-            <a:off x="6140940" y="4630842"/>
+            <a:off x="4019532" y="4630842"/>
             <a:ext cx="1" cy="138278"/>
           </a:xfrm>
           <a:prstGeom prst="line">
@@ -2095,7 +2095,7 @@
         </p:nvCxnSpPr>
         <p:spPr>
           <a:xfrm flipH="1">
-            <a:off x="5933523" y="4769120"/>
+            <a:off x="3812115" y="4769120"/>
             <a:ext cx="207417" cy="1"/>
           </a:xfrm>
           <a:prstGeom prst="line">
@@ -2118,7 +2118,7 @@
         </p:nvSpPr>
         <p:spPr>
           <a:xfrm>
-            <a:off x="6182424" y="4485650"/>
+            <a:off x="4061016" y="4485650"/>
             <a:ext cx="506789" cy="89881"/>
           </a:xfrm>
           <a:prstGeom prst="rect">
@@ -2160,7 +2160,7 @@
         </p:nvSpPr>
         <p:spPr>
           <a:xfrm>
-            <a:off x="5940437" y="4582444"/>
+            <a:off x="3819029" y="4582444"/>
             <a:ext cx="96795" cy="96795"/>
           </a:xfrm>
           <a:prstGeom prst="ellipse">
@@ -2182,7 +2182,7 @@
         </p:nvSpPr>
         <p:spPr>
           <a:xfrm>
-            <a:off x="5940437" y="4582444"/>
+            <a:off x="3819029" y="4582444"/>
             <a:ext cx="96795" cy="96795"/>
           </a:xfrm>
           <a:prstGeom prst="rect">
@@ -2224,7 +2224,7 @@
         </p:nvCxnSpPr>
         <p:spPr>
           <a:xfrm>
-            <a:off x="4861869" y="5329146"/>
+            <a:off x="2740461" y="5329146"/>
             <a:ext cx="2696421" cy="1"/>
           </a:xfrm>
           <a:prstGeom prst="line">
@@ -2247,7 +2247,7 @@
         </p:nvSpPr>
         <p:spPr>
           <a:xfrm>
-            <a:off x="4889525" y="5183954"/>
+            <a:off x="2768117" y="5183954"/>
             <a:ext cx="2641110" cy="89881"/>
           </a:xfrm>
           <a:prstGeom prst="rect">
@@ -2289,7 +2289,7 @@
         </p:nvSpPr>
         <p:spPr>
           <a:xfrm>
-            <a:off x="4882611" y="5280748"/>
+            <a:off x="2761203" y="5280748"/>
             <a:ext cx="96795" cy="96795"/>
           </a:xfrm>
           <a:prstGeom prst="ellipse">
@@ -2311,7 +2311,7 @@
         </p:nvSpPr>
         <p:spPr>
           <a:xfrm>
-            <a:off x="4882611" y="5280748"/>
+            <a:off x="2761203" y="5280748"/>
             <a:ext cx="96795" cy="96795"/>
           </a:xfrm>
           <a:prstGeom prst="rect">
@@ -2353,7 +2353,7 @@
         </p:nvCxnSpPr>
         <p:spPr>
           <a:xfrm flipH="1">
-            <a:off x="4861869" y="5647185"/>
+            <a:off x="2740461" y="5647185"/>
             <a:ext cx="3007546" cy="1"/>
           </a:xfrm>
           <a:prstGeom prst="line">
@@ -2376,7 +2376,7 @@
         </p:nvSpPr>
         <p:spPr>
           <a:xfrm>
-            <a:off x="4889525" y="5501993"/>
+            <a:off x="2768117" y="5501993"/>
             <a:ext cx="2952235" cy="89881"/>
           </a:xfrm>
           <a:prstGeom prst="rect">
@@ -2418,7 +2418,7 @@
         </p:nvSpPr>
         <p:spPr>
           <a:xfrm>
-            <a:off x="7751879" y="5598788"/>
+            <a:off x="5630471" y="5598788"/>
             <a:ext cx="96795" cy="96795"/>
           </a:xfrm>
           <a:prstGeom prst="ellipse">
@@ -2440,7 +2440,7 @@
         </p:nvSpPr>
         <p:spPr>
           <a:xfrm>
-            <a:off x="7751879" y="5598788"/>
+            <a:off x="5630471" y="5598788"/>
             <a:ext cx="96795" cy="96795"/>
           </a:xfrm>
           <a:prstGeom prst="rect">
@@ -2482,7 +2482,7 @@
         </p:nvCxnSpPr>
         <p:spPr>
           <a:xfrm>
-            <a:off x="7821018" y="5598788"/>
+            <a:off x="5699610" y="5598788"/>
             <a:ext cx="96795" cy="96794"/>
           </a:xfrm>
           <a:prstGeom prst="line">
@@ -2504,7 +2504,7 @@
         </p:nvCxnSpPr>
         <p:spPr>
           <a:xfrm flipV="1">
-            <a:off x="7821018" y="5598788"/>
+            <a:off x="5699610" y="5598788"/>
             <a:ext cx="96795" cy="96794"/>
           </a:xfrm>
           <a:prstGeom prst="line">
@@ -2526,7 +2526,7 @@
         </p:nvCxnSpPr>
         <p:spPr>
           <a:xfrm flipH="1">
-            <a:off x="3859353" y="5889171"/>
+            <a:off x="1737945" y="5889171"/>
             <a:ext cx="933377" cy="1"/>
           </a:xfrm>
           <a:prstGeom prst="line">
@@ -2549,7 +2549,7 @@
         </p:nvSpPr>
         <p:spPr>
           <a:xfrm>
-            <a:off x="3887009" y="5743980"/>
+            <a:off x="1765601" y="5743980"/>
             <a:ext cx="878065" cy="89881"/>
           </a:xfrm>
           <a:prstGeom prst="rect">
@@ -2591,7 +2591,7 @@
         </p:nvSpPr>
         <p:spPr>
           <a:xfrm>
-            <a:off x="4675194" y="5840774"/>
+            <a:off x="2553786" y="5840774"/>
             <a:ext cx="96795" cy="96795"/>
           </a:xfrm>
           <a:prstGeom prst="ellipse">
@@ -2613,7 +2613,7 @@
         </p:nvSpPr>
         <p:spPr>
           <a:xfrm>
-            <a:off x="4675194" y="5840774"/>
+            <a:off x="2553786" y="5840774"/>
             <a:ext cx="96795" cy="96795"/>
           </a:xfrm>
           <a:prstGeom prst="rect">
@@ -2655,7 +2655,7 @@
         </p:nvSpPr>
         <p:spPr>
           <a:xfrm>
-            <a:off x="3548228" y="1374395"/>
+            <a:off x="1426820" y="1374395"/>
             <a:ext cx="622251" cy="96795"/>
           </a:xfrm>
           <a:prstGeom prst="rect">
@@ -2697,7 +2697,7 @@
         </p:nvSpPr>
         <p:spPr>
           <a:xfrm>
-            <a:off x="3548228" y="6096588"/>
+            <a:off x="1426820" y="6096588"/>
             <a:ext cx="622251" cy="96795"/>
           </a:xfrm>
           <a:prstGeom prst="rect">
@@ -2739,7 +2739,7 @@
         </p:nvSpPr>
         <p:spPr>
           <a:xfrm>
-            <a:off x="4516174" y="1374395"/>
+            <a:off x="2394766" y="1374395"/>
             <a:ext cx="622251" cy="96795"/>
           </a:xfrm>
           <a:prstGeom prst="rect">
@@ -2781,7 +2781,7 @@
         </p:nvSpPr>
         <p:spPr>
           <a:xfrm>
-            <a:off x="4516174" y="6096588"/>
+            <a:off x="2394766" y="6096588"/>
             <a:ext cx="622251" cy="96795"/>
           </a:xfrm>
           <a:prstGeom prst="rect">
@@ -2823,7 +2823,7 @@
         </p:nvSpPr>
         <p:spPr>
           <a:xfrm>
-            <a:off x="5622398" y="1374395"/>
+            <a:off x="3500990" y="1374395"/>
             <a:ext cx="622251" cy="96795"/>
           </a:xfrm>
           <a:prstGeom prst="rect">
@@ -2865,7 +2865,7 @@
         </p:nvSpPr>
         <p:spPr>
           <a:xfrm>
-            <a:off x="5622398" y="6096588"/>
+            <a:off x="3500990" y="6096588"/>
             <a:ext cx="622251" cy="96795"/>
           </a:xfrm>
           <a:prstGeom prst="rect">
@@ -2907,7 +2907,7 @@
         </p:nvSpPr>
         <p:spPr>
           <a:xfrm>
-            <a:off x="6590344" y="1374395"/>
+            <a:off x="4468936" y="1374395"/>
             <a:ext cx="622251" cy="96795"/>
           </a:xfrm>
           <a:prstGeom prst="rect">
@@ -2949,7 +2949,7 @@
         </p:nvSpPr>
         <p:spPr>
           <a:xfrm>
-            <a:off x="6590344" y="6096588"/>
+            <a:off x="4468936" y="6096588"/>
             <a:ext cx="622251" cy="96795"/>
           </a:xfrm>
           <a:prstGeom prst="rect">
@@ -2991,7 +2991,7 @@
         </p:nvSpPr>
         <p:spPr>
           <a:xfrm>
-            <a:off x="7558290" y="5280748"/>
+            <a:off x="5436882" y="5280748"/>
             <a:ext cx="622251" cy="96795"/>
           </a:xfrm>
           <a:prstGeom prst="rect">
@@ -3021,6 +3021,413 @@
                 </a:solidFill>
               </a:rPr>
               <a:t>Mailer</a:t>
+            </a:r>
+          </a:p>
+        </p:txBody>
+      </p:sp>
+      <p:sp>
+        <p:nvSpPr>
+          <p:cNvPr id="4" name="Mermaid source"/>
+          <p:cNvSpPr/>
+          <p:nvPr/>
+        </p:nvSpPr>
+        <p:spPr>
+          <a:xfrm>
+            <a:off x="7674864" y="1028700"/>
+            <a:ext cx="4059936" cy="5372100"/>
+          </a:xfrm>
+          <a:prstGeom prst="rect">
+            <a:avLst/>
+          </a:prstGeom>
+          <a:solidFill>
+            <a:srgbClr val="F3F4F6"/>
+          </a:solidFill>
+          <a:ln w="9525">
+            <a:solidFill>
+              <a:srgbClr val="D1D5DB"/>
+            </a:solidFill>
+          </a:ln>
+        </p:spPr>
+        <p:txBody>
+          <a:bodyPr wrap="square" lIns="91440" tIns="45720" rIns="91440" bIns="45720" anchor="t">
+            <a:noAutofit/>
+          </a:bodyPr>
+          <a:lstStyle/>
+          <a:p>
+            <a:pPr algn="l"/>
+            <a:r>
+              <a:rPr lang="en-US" sz="1100" dirty="0">
+                <a:solidFill>
+                  <a:srgbClr val="1F2937"/>
+                </a:solidFill>
+                <a:latin typeface="Consolas"/>
+                <a:cs typeface="Consolas"/>
+              </a:rPr>
+              <a:t>sequenceDiagram</a:t>
+            </a:r>
+          </a:p>
+          <a:p>
+            <a:pPr algn="l"/>
+            <a:r>
+              <a:rPr lang="en-US" sz="1100" dirty="0">
+                <a:solidFill>
+                  <a:srgbClr val="1F2937"/>
+                </a:solidFill>
+                <a:latin typeface="Consolas"/>
+                <a:cs typeface="Consolas"/>
+              </a:rPr>
+              <a:t>    title Checkout</a:t>
+            </a:r>
+          </a:p>
+          <a:p>
+            <a:pPr algn="l"/>
+            <a:r>
+              <a:rPr lang="en-US" sz="1100" dirty="0">
+                <a:solidFill>
+                  <a:srgbClr val="1F2937"/>
+                </a:solidFill>
+                <a:latin typeface="Consolas"/>
+                <a:cs typeface="Consolas"/>
+              </a:rPr>
+              <a:t>    autonumber</a:t>
+            </a:r>
+          </a:p>
+          <a:p>
+            <a:pPr algn="l"/>
+            <a:r>
+              <a:rPr lang="en-US" sz="1100" dirty="0">
+                <a:solidFill>
+                  <a:srgbClr val="1F2937"/>
+                </a:solidFill>
+                <a:latin typeface="Consolas"/>
+                <a:cs typeface="Consolas"/>
+              </a:rPr>
+              <a:t>    actor U as User</a:t>
+            </a:r>
+          </a:p>
+          <a:p>
+            <a:pPr algn="l"/>
+            <a:r>
+              <a:rPr lang="en-US" sz="1100" dirty="0">
+                <a:solidFill>
+                  <a:srgbClr val="1F2937"/>
+                </a:solidFill>
+                <a:latin typeface="Consolas"/>
+                <a:cs typeface="Consolas"/>
+              </a:rPr>
+              <a:t>    participant W as Web App</a:t>
+            </a:r>
+          </a:p>
+          <a:p>
+            <a:pPr algn="l"/>
+            <a:r>
+              <a:rPr lang="en-US" sz="1100" dirty="0">
+                <a:solidFill>
+                  <a:srgbClr val="1F2937"/>
+                </a:solidFill>
+                <a:latin typeface="Consolas"/>
+                <a:cs typeface="Consolas"/>
+              </a:rPr>
+              <a:t>    participant API</a:t>
+            </a:r>
+          </a:p>
+          <a:p>
+            <a:pPr algn="l"/>
+            <a:r>
+              <a:rPr lang="en-US" sz="1100" dirty="0">
+                <a:solidFill>
+                  <a:srgbClr val="1F2937"/>
+                </a:solidFill>
+                <a:latin typeface="Consolas"/>
+                <a:cs typeface="Consolas"/>
+              </a:rPr>
+              <a:t>    participant DB as Database</a:t>
+            </a:r>
+          </a:p>
+          <a:p>
+            <a:pPr algn="l"/>
+            <a:r>
+              <a:rPr lang="en-US" sz="1100" dirty="0">
+                <a:solidFill>
+                  <a:srgbClr val="1F2937"/>
+                </a:solidFill>
+                <a:latin typeface="Consolas"/>
+                <a:cs typeface="Consolas"/>
+              </a:rPr>
+              <a:t>    U-&gt;&gt;+W: Place order</a:t>
+            </a:r>
+          </a:p>
+          <a:p>
+            <a:pPr algn="l"/>
+            <a:r>
+              <a:rPr lang="en-US" sz="1100" dirty="0">
+                <a:solidFill>
+                  <a:srgbClr val="1F2937"/>
+                </a:solidFill>
+                <a:latin typeface="Consolas"/>
+                <a:cs typeface="Consolas"/>
+              </a:rPr>
+              <a:t>    W-&gt;&gt;API: POST /orders</a:t>
+            </a:r>
+          </a:p>
+          <a:p>
+            <a:pPr algn="l"/>
+            <a:r>
+              <a:rPr lang="en-US" sz="1100" dirty="0">
+                <a:solidFill>
+                  <a:srgbClr val="1F2937"/>
+                </a:solidFill>
+                <a:latin typeface="Consolas"/>
+                <a:cs typeface="Consolas"/>
+              </a:rPr>
+              <a:t>    activate API</a:t>
+            </a:r>
+          </a:p>
+          <a:p>
+            <a:pPr algn="l"/>
+            <a:r>
+              <a:rPr lang="en-US" sz="1100" dirty="0">
+                <a:solidFill>
+                  <a:srgbClr val="1F2937"/>
+                </a:solidFill>
+                <a:latin typeface="Consolas"/>
+                <a:cs typeface="Consolas"/>
+              </a:rPr>
+              <a:t>    API-&gt;&gt;DB: INSERT order</a:t>
+            </a:r>
+          </a:p>
+          <a:p>
+            <a:pPr algn="l"/>
+            <a:r>
+              <a:rPr lang="en-US" sz="1100" dirty="0">
+                <a:solidFill>
+                  <a:srgbClr val="1F2937"/>
+                </a:solidFill>
+                <a:latin typeface="Consolas"/>
+                <a:cs typeface="Consolas"/>
+              </a:rPr>
+              <a:t>    DB--&gt;&gt;API: ok</a:t>
+            </a:r>
+          </a:p>
+          <a:p>
+            <a:pPr algn="l"/>
+            <a:r>
+              <a:rPr lang="en-US" sz="1100" dirty="0">
+                <a:solidFill>
+                  <a:srgbClr val="1F2937"/>
+                </a:solidFill>
+                <a:latin typeface="Consolas"/>
+                <a:cs typeface="Consolas"/>
+              </a:rPr>
+              <a:t>    API-xW: Payment declined</a:t>
+            </a:r>
+          </a:p>
+          <a:p>
+            <a:pPr algn="l"/>
+            <a:r>
+              <a:rPr lang="en-US" sz="1100" dirty="0">
+                <a:solidFill>
+                  <a:srgbClr val="1F2937"/>
+                </a:solidFill>
+                <a:latin typeface="Consolas"/>
+                <a:cs typeface="Consolas"/>
+              </a:rPr>
+              <a:t>    Note over API,DB: Retried 3 times</a:t>
+            </a:r>
+          </a:p>
+          <a:p>
+            <a:pPr algn="l"/>
+            <a:r>
+              <a:rPr lang="en-US" sz="1100" dirty="0">
+                <a:solidFill>
+                  <a:srgbClr val="1F2937"/>
+                </a:solidFill>
+                <a:latin typeface="Consolas"/>
+                <a:cs typeface="Consolas"/>
+              </a:rPr>
+              <a:t>    loop Every minute</a:t>
+            </a:r>
+          </a:p>
+          <a:p>
+            <a:pPr algn="l"/>
+            <a:r>
+              <a:rPr lang="en-US" sz="1100" dirty="0">
+                <a:solidFill>
+                  <a:srgbClr val="1F2937"/>
+                </a:solidFill>
+                <a:latin typeface="Consolas"/>
+                <a:cs typeface="Consolas"/>
+              </a:rPr>
+              <a:t>        W-)API: poll status</a:t>
+            </a:r>
+          </a:p>
+          <a:p>
+            <a:pPr algn="l"/>
+            <a:r>
+              <a:rPr lang="en-US" sz="1100" dirty="0">
+                <a:solidFill>
+                  <a:srgbClr val="1F2937"/>
+                </a:solidFill>
+                <a:latin typeface="Consolas"/>
+                <a:cs typeface="Consolas"/>
+              </a:rPr>
+              <a:t>    end</a:t>
+            </a:r>
+          </a:p>
+          <a:p>
+            <a:pPr algn="l"/>
+            <a:r>
+              <a:rPr lang="en-US" sz="1100" dirty="0">
+                <a:solidFill>
+                  <a:srgbClr val="1F2937"/>
+                </a:solidFill>
+                <a:latin typeface="Consolas"/>
+                <a:cs typeface="Consolas"/>
+              </a:rPr>
+              <a:t>    alt paid</a:t>
+            </a:r>
+          </a:p>
+          <a:p>
+            <a:pPr algn="l"/>
+            <a:r>
+              <a:rPr lang="en-US" sz="1100" dirty="0">
+                <a:solidFill>
+                  <a:srgbClr val="1F2937"/>
+                </a:solidFill>
+                <a:latin typeface="Consolas"/>
+                <a:cs typeface="Consolas"/>
+              </a:rPr>
+              <a:t>        API--&gt;&gt;-W: 200 OK</a:t>
+            </a:r>
+          </a:p>
+          <a:p>
+            <a:pPr algn="l"/>
+            <a:r>
+              <a:rPr lang="en-US" sz="1100" dirty="0">
+                <a:solidFill>
+                  <a:srgbClr val="1F2937"/>
+                </a:solidFill>
+                <a:latin typeface="Consolas"/>
+                <a:cs typeface="Consolas"/>
+              </a:rPr>
+              <a:t>    else failed</a:t>
+            </a:r>
+          </a:p>
+          <a:p>
+            <a:pPr algn="l"/>
+            <a:r>
+              <a:rPr lang="en-US" sz="1100" dirty="0">
+                <a:solidFill>
+                  <a:srgbClr val="1F2937"/>
+                </a:solidFill>
+                <a:latin typeface="Consolas"/>
+                <a:cs typeface="Consolas"/>
+              </a:rPr>
+              <a:t>        API--)W: 402</a:t>
+            </a:r>
+          </a:p>
+          <a:p>
+            <a:pPr algn="l"/>
+            <a:r>
+              <a:rPr lang="en-US" sz="1100" dirty="0">
+                <a:solidFill>
+                  <a:srgbClr val="1F2937"/>
+                </a:solidFill>
+                <a:latin typeface="Consolas"/>
+                <a:cs typeface="Consolas"/>
+              </a:rPr>
+              <a:t>        API-&gt;&gt;API: log failure</a:t>
+            </a:r>
+          </a:p>
+          <a:p>
+            <a:pPr algn="l"/>
+            <a:r>
+              <a:rPr lang="en-US" sz="1100" dirty="0">
+                <a:solidFill>
+                  <a:srgbClr val="1F2937"/>
+                </a:solidFill>
+                <a:latin typeface="Consolas"/>
+                <a:cs typeface="Consolas"/>
+              </a:rPr>
+              <a:t>    end</a:t>
+            </a:r>
+          </a:p>
+          <a:p>
+            <a:pPr algn="l"/>
+            <a:r>
+              <a:rPr lang="en-US" sz="1100" dirty="0">
+                <a:solidFill>
+                  <a:srgbClr val="1F2937"/>
+                </a:solidFill>
+                <a:latin typeface="Consolas"/>
+                <a:cs typeface="Consolas"/>
+              </a:rPr>
+              <a:t>    Note right of W: done</a:t>
+            </a:r>
+          </a:p>
+          <a:p>
+            <a:pPr algn="l"/>
+            <a:r>
+              <a:rPr lang="en-US" sz="1100" dirty="0">
+                <a:solidFill>
+                  <a:srgbClr val="1F2937"/>
+                </a:solidFill>
+                <a:latin typeface="Consolas"/>
+                <a:cs typeface="Consolas"/>
+              </a:rPr>
+              <a:t>    create participant M as Mailer</a:t>
+            </a:r>
+          </a:p>
+          <a:p>
+            <a:pPr algn="l"/>
+            <a:r>
+              <a:rPr lang="en-US" sz="1100" dirty="0">
+                <a:solidFill>
+                  <a:srgbClr val="1F2937"/>
+                </a:solidFill>
+                <a:latin typeface="Consolas"/>
+                <a:cs typeface="Consolas"/>
+              </a:rPr>
+              <a:t>    W-&gt;&gt;M: send receipt</a:t>
+            </a:r>
+          </a:p>
+          <a:p>
+            <a:pPr algn="l"/>
+            <a:r>
+              <a:rPr lang="en-US" sz="1100" dirty="0">
+                <a:solidFill>
+                  <a:srgbClr val="1F2937"/>
+                </a:solidFill>
+                <a:latin typeface="Consolas"/>
+                <a:cs typeface="Consolas"/>
+              </a:rPr>
+              <a:t>    destroy M</a:t>
+            </a:r>
+          </a:p>
+          <a:p>
+            <a:pPr algn="l"/>
+            <a:r>
+              <a:rPr lang="en-US" sz="1100" dirty="0">
+                <a:solidFill>
+                  <a:srgbClr val="1F2937"/>
+                </a:solidFill>
+                <a:latin typeface="Consolas"/>
+                <a:cs typeface="Consolas"/>
+              </a:rPr>
+              <a:t>    M--&gt;&gt;W: sent</a:t>
+            </a:r>
+          </a:p>
+          <a:p>
+            <a:pPr algn="l"/>
+            <a:r>
+              <a:rPr lang="en-US" sz="1100" dirty="0">
+                <a:solidFill>
+                  <a:srgbClr val="1F2937"/>
+                </a:solidFill>
+                <a:latin typeface="Consolas"/>
+                <a:cs typeface="Consolas"/>
+              </a:rPr>
+              <a:t>    W--&gt;&gt;-U: Confirmation</a:t>
             </a:r>
           </a:p>
         </p:txBody>
